--- a/01-精益工具知识库/PPT/09-问题解决方法.pptx
+++ b/01-精益工具知识库/PPT/09-问题解决方法.pptx
@@ -1522,6 +1522,10 @@
             <a:prstDash val="solid"/>
           </a:ln>
         </p:spPr>
+        <p:txBody>
+          <a:bodyPr/>
+          <a:p/>
+        </p:txBody>
       </p:sp>
       <p:sp>
         <p:nvSpPr>
@@ -1547,6 +1551,10 @@
             <a:prstDash val="solid"/>
           </a:ln>
         </p:spPr>
+        <p:txBody>
+          <a:bodyPr/>
+          <a:p/>
+        </p:txBody>
       </p:sp>
       <p:sp>
         <p:nvSpPr>
@@ -1611,6 +1619,10 @@
             <a:prstDash val="solid"/>
           </a:ln>
         </p:spPr>
+        <p:txBody>
+          <a:bodyPr/>
+          <a:p/>
+        </p:txBody>
       </p:sp>
       <p:sp>
         <p:nvSpPr>
@@ -1802,6 +1814,10 @@
             <a:prstDash val="solid"/>
           </a:ln>
         </p:spPr>
+        <p:txBody>
+          <a:bodyPr/>
+          <a:p/>
+        </p:txBody>
       </p:sp>
       <p:sp>
         <p:nvSpPr>
@@ -1827,6 +1843,10 @@
             <a:prstDash val="solid"/>
           </a:ln>
         </p:spPr>
+        <p:txBody>
+          <a:bodyPr/>
+          <a:p/>
+        </p:txBody>
       </p:sp>
       <p:sp>
         <p:nvSpPr>
@@ -1930,6 +1950,10 @@
             <a:prstDash val="solid"/>
           </a:ln>
         </p:spPr>
+        <p:txBody>
+          <a:bodyPr/>
+          <a:p/>
+        </p:txBody>
       </p:sp>
       <p:sp>
         <p:nvSpPr>
@@ -1996,6 +2020,10 @@
             <a:prstDash val="solid"/>
           </a:ln>
         </p:spPr>
+        <p:txBody>
+          <a:bodyPr/>
+          <a:p/>
+        </p:txBody>
       </p:sp>
       <p:sp>
         <p:nvSpPr>
@@ -2060,6 +2088,10 @@
             <a:prstDash val="solid"/>
           </a:ln>
         </p:spPr>
+        <p:txBody>
+          <a:bodyPr/>
+          <a:p/>
+        </p:txBody>
       </p:sp>
       <p:sp>
         <p:nvSpPr>
@@ -2085,6 +2117,10 @@
             <a:prstDash val="solid"/>
           </a:ln>
         </p:spPr>
+        <p:txBody>
+          <a:bodyPr/>
+          <a:p/>
+        </p:txBody>
       </p:sp>
       <p:sp>
         <p:nvSpPr>
@@ -2110,6 +2146,10 @@
             <a:prstDash val="solid"/>
           </a:ln>
         </p:spPr>
+        <p:txBody>
+          <a:bodyPr/>
+          <a:p/>
+        </p:txBody>
       </p:sp>
       <p:sp>
         <p:nvSpPr>
@@ -2308,6 +2348,10 @@
             <a:prstDash val="solid"/>
           </a:ln>
         </p:spPr>
+        <p:txBody>
+          <a:bodyPr/>
+          <a:p/>
+        </p:txBody>
       </p:sp>
       <p:sp>
         <p:nvSpPr>
@@ -2333,6 +2377,10 @@
             <a:prstDash val="solid"/>
           </a:ln>
         </p:spPr>
+        <p:txBody>
+          <a:bodyPr/>
+          <a:p/>
+        </p:txBody>
       </p:sp>
       <p:sp>
         <p:nvSpPr>
@@ -2358,6 +2406,10 @@
             <a:prstDash val="solid"/>
           </a:ln>
         </p:spPr>
+        <p:txBody>
+          <a:bodyPr/>
+          <a:p/>
+        </p:txBody>
       </p:sp>
       <p:sp>
         <p:nvSpPr>
@@ -2580,6 +2632,10 @@
             <a:prstDash val="solid"/>
           </a:ln>
         </p:spPr>
+        <p:txBody>
+          <a:bodyPr/>
+          <a:p/>
+        </p:txBody>
       </p:sp>
       <p:sp>
         <p:nvSpPr>
@@ -2719,6 +2775,10 @@
             <a:prstDash val="solid"/>
           </a:ln>
         </p:spPr>
+        <p:txBody>
+          <a:bodyPr/>
+          <a:p/>
+        </p:txBody>
       </p:sp>
       <p:sp>
         <p:nvSpPr>
@@ -2858,6 +2918,10 @@
             <a:prstDash val="solid"/>
           </a:ln>
         </p:spPr>
+        <p:txBody>
+          <a:bodyPr/>
+          <a:p/>
+        </p:txBody>
       </p:sp>
       <p:sp>
         <p:nvSpPr>
@@ -2997,6 +3061,10 @@
             <a:prstDash val="solid"/>
           </a:ln>
         </p:spPr>
+        <p:txBody>
+          <a:bodyPr/>
+          <a:p/>
+        </p:txBody>
       </p:sp>
       <p:sp>
         <p:nvSpPr>
@@ -3136,6 +3204,10 @@
             <a:prstDash val="solid"/>
           </a:ln>
         </p:spPr>
+        <p:txBody>
+          <a:bodyPr/>
+          <a:p/>
+        </p:txBody>
       </p:sp>
       <p:sp>
         <p:nvSpPr>
@@ -3314,6 +3386,10 @@
             <a:prstDash val="solid"/>
           </a:ln>
         </p:spPr>
+        <p:txBody>
+          <a:bodyPr/>
+          <a:p/>
+        </p:txBody>
       </p:sp>
       <p:sp>
         <p:nvSpPr>
@@ -3387,7 +3463,7 @@
                 <a:ea typeface="Microsoft YaHei" pitchFamily="34" charset="-122"/>
                 <a:cs typeface="Microsoft YaHei" pitchFamily="34" charset="-120"/>
               </a:rPr>
-              <a:t>冷镦机首件检验记录是否按时填写？</a:t>
+              <a:t>机加工设备首件检验记录是否按时填写？</a:t>
             </a:r>
             <a:endParaRPr lang="en-US" sz="950" dirty="0"/>
           </a:p>
@@ -3419,6 +3495,10 @@
             <a:prstDash val="solid"/>
           </a:ln>
         </p:spPr>
+        <p:txBody>
+          <a:bodyPr/>
+          <a:p/>
+        </p:txBody>
       </p:sp>
       <p:sp>
         <p:nvSpPr>
@@ -3492,7 +3572,7 @@
                 <a:ea typeface="Microsoft YaHei" pitchFamily="34" charset="-122"/>
                 <a:cs typeface="Microsoft YaHei" pitchFamily="34" charset="-120"/>
               </a:rPr>
-              <a:t>攻牙工序是否有漏攻防错装置？</a:t>
+              <a:t>精加工工序是否有漏攻防错装置？</a:t>
             </a:r>
             <a:endParaRPr lang="en-US" sz="950" dirty="0"/>
           </a:p>
@@ -3524,6 +3604,10 @@
             <a:prstDash val="solid"/>
           </a:ln>
         </p:spPr>
+        <p:txBody>
+          <a:bodyPr/>
+          <a:p/>
+        </p:txBody>
       </p:sp>
       <p:sp>
         <p:nvSpPr>
@@ -3629,6 +3713,10 @@
             <a:prstDash val="solid"/>
           </a:ln>
         </p:spPr>
+        <p:txBody>
+          <a:bodyPr/>
+          <a:p/>
+        </p:txBody>
       </p:sp>
       <p:sp>
         <p:nvSpPr>
@@ -3734,6 +3822,10 @@
             <a:prstDash val="solid"/>
           </a:ln>
         </p:spPr>
+        <p:txBody>
+          <a:bodyPr/>
+          <a:p/>
+        </p:txBody>
       </p:sp>
       <p:sp>
         <p:nvSpPr>
@@ -3839,6 +3931,10 @@
             <a:prstDash val="solid"/>
           </a:ln>
         </p:spPr>
+        <p:txBody>
+          <a:bodyPr/>
+          <a:p/>
+        </p:txBody>
       </p:sp>
       <p:sp>
         <p:nvSpPr>
@@ -3974,6 +4070,10 @@
             <a:prstDash val="solid"/>
           </a:ln>
         </p:spPr>
+        <p:txBody>
+          <a:bodyPr/>
+          <a:p/>
+        </p:txBody>
       </p:sp>
       <p:sp>
         <p:nvSpPr>
@@ -3999,6 +4099,10 @@
             <a:prstDash val="solid"/>
           </a:ln>
         </p:spPr>
+        <p:txBody>
+          <a:bodyPr/>
+          <a:p/>
+        </p:txBody>
       </p:sp>
       <p:sp>
         <p:nvSpPr>
@@ -4102,6 +4206,10 @@
             <a:prstDash val="solid"/>
           </a:ln>
         </p:spPr>
+        <p:txBody>
+          <a:bodyPr/>
+          <a:p/>
+        </p:txBody>
       </p:sp>
       <p:sp>
         <p:nvSpPr>
@@ -4168,6 +4276,10 @@
             <a:prstDash val="solid"/>
           </a:ln>
         </p:spPr>
+        <p:txBody>
+          <a:bodyPr/>
+          <a:p/>
+        </p:txBody>
       </p:sp>
       <p:sp>
         <p:nvSpPr>
@@ -4232,6 +4344,10 @@
             <a:prstDash val="solid"/>
           </a:ln>
         </p:spPr>
+        <p:txBody>
+          <a:bodyPr/>
+          <a:p/>
+        </p:txBody>
       </p:sp>
       <p:sp>
         <p:nvSpPr>
@@ -4296,6 +4412,10 @@
             <a:prstDash val="solid"/>
           </a:ln>
         </p:spPr>
+        <p:txBody>
+          <a:bodyPr/>
+          <a:p/>
+        </p:txBody>
       </p:sp>
       <p:sp>
         <p:nvSpPr>
@@ -4321,6 +4441,10 @@
             <a:prstDash val="solid"/>
           </a:ln>
         </p:spPr>
+        <p:txBody>
+          <a:bodyPr/>
+          <a:p/>
+        </p:txBody>
       </p:sp>
       <p:sp>
         <p:nvSpPr>
@@ -4441,6 +4565,10 @@
             <a:prstDash val="solid"/>
           </a:ln>
         </p:spPr>
+        <p:txBody>
+          <a:bodyPr/>
+          <a:p/>
+        </p:txBody>
       </p:sp>
       <p:sp>
         <p:nvSpPr>
@@ -4466,6 +4594,10 @@
             <a:prstDash val="solid"/>
           </a:ln>
         </p:spPr>
+        <p:txBody>
+          <a:bodyPr/>
+          <a:p/>
+        </p:txBody>
       </p:sp>
       <p:sp>
         <p:nvSpPr>
@@ -4603,6 +4735,10 @@
             <a:prstDash val="solid"/>
           </a:ln>
         </p:spPr>
+        <p:txBody>
+          <a:bodyPr/>
+          <a:p/>
+        </p:txBody>
       </p:sp>
       <p:sp>
         <p:nvSpPr>
@@ -4628,6 +4764,10 @@
             <a:prstDash val="solid"/>
           </a:ln>
         </p:spPr>
+        <p:txBody>
+          <a:bodyPr/>
+          <a:p/>
+        </p:txBody>
       </p:sp>
       <p:sp>
         <p:nvSpPr>
@@ -4748,6 +4888,10 @@
             <a:prstDash val="solid"/>
           </a:ln>
         </p:spPr>
+        <p:txBody>
+          <a:bodyPr/>
+          <a:p/>
+        </p:txBody>
       </p:sp>
       <p:sp>
         <p:nvSpPr>
@@ -4773,6 +4917,10 @@
             <a:prstDash val="solid"/>
           </a:ln>
         </p:spPr>
+        <p:txBody>
+          <a:bodyPr/>
+          <a:p/>
+        </p:txBody>
       </p:sp>
       <p:sp>
         <p:nvSpPr>
@@ -4910,6 +5058,10 @@
             <a:prstDash val="solid"/>
           </a:ln>
         </p:spPr>
+        <p:txBody>
+          <a:bodyPr/>
+          <a:p/>
+        </p:txBody>
       </p:sp>
       <p:sp>
         <p:nvSpPr>
@@ -4935,6 +5087,10 @@
             <a:prstDash val="solid"/>
           </a:ln>
         </p:spPr>
+        <p:txBody>
+          <a:bodyPr/>
+          <a:p/>
+        </p:txBody>
       </p:sp>
       <p:sp>
         <p:nvSpPr>
@@ -5055,6 +5211,10 @@
             <a:prstDash val="solid"/>
           </a:ln>
         </p:spPr>
+        <p:txBody>
+          <a:bodyPr/>
+          <a:p/>
+        </p:txBody>
       </p:sp>
       <p:sp>
         <p:nvSpPr>
@@ -5080,6 +5240,10 @@
             <a:prstDash val="solid"/>
           </a:ln>
         </p:spPr>
+        <p:txBody>
+          <a:bodyPr/>
+          <a:p/>
+        </p:txBody>
       </p:sp>
       <p:sp>
         <p:nvSpPr>
@@ -5217,6 +5381,10 @@
             <a:prstDash val="solid"/>
           </a:ln>
         </p:spPr>
+        <p:txBody>
+          <a:bodyPr/>
+          <a:p/>
+        </p:txBody>
       </p:sp>
       <p:sp>
         <p:nvSpPr>
@@ -5242,6 +5410,10 @@
             <a:prstDash val="solid"/>
           </a:ln>
         </p:spPr>
+        <p:txBody>
+          <a:bodyPr/>
+          <a:p/>
+        </p:txBody>
       </p:sp>
       <p:sp>
         <p:nvSpPr>
@@ -5379,6 +5551,10 @@
             <a:prstDash val="solid"/>
           </a:ln>
         </p:spPr>
+        <p:txBody>
+          <a:bodyPr/>
+          <a:p/>
+        </p:txBody>
       </p:sp>
       <p:sp>
         <p:nvSpPr>
@@ -5404,6 +5580,10 @@
             <a:prstDash val="solid"/>
           </a:ln>
         </p:spPr>
+        <p:txBody>
+          <a:bodyPr/>
+          <a:p/>
+        </p:txBody>
       </p:sp>
       <p:sp>
         <p:nvSpPr>
@@ -5541,6 +5721,10 @@
             <a:prstDash val="solid"/>
           </a:ln>
         </p:spPr>
+        <p:txBody>
+          <a:bodyPr/>
+          <a:p/>
+        </p:txBody>
       </p:sp>
       <p:sp>
         <p:nvSpPr>
@@ -5637,6 +5821,10 @@
             <a:prstDash val="solid"/>
           </a:ln>
         </p:spPr>
+        <p:txBody>
+          <a:bodyPr/>
+          <a:p/>
+        </p:txBody>
       </p:sp>
       <p:sp>
         <p:nvSpPr>
@@ -5662,6 +5850,10 @@
             <a:prstDash val="solid"/>
           </a:ln>
         </p:spPr>
+        <p:txBody>
+          <a:bodyPr/>
+          <a:p/>
+        </p:txBody>
       </p:sp>
       <p:sp>
         <p:nvSpPr>
@@ -5765,6 +5957,10 @@
             <a:prstDash val="solid"/>
           </a:ln>
         </p:spPr>
+        <p:txBody>
+          <a:bodyPr/>
+          <a:p/>
+        </p:txBody>
       </p:sp>
       <p:sp>
         <p:nvSpPr>
@@ -5831,6 +6027,10 @@
             <a:prstDash val="solid"/>
           </a:ln>
         </p:spPr>
+        <p:txBody>
+          <a:bodyPr/>
+          <a:p/>
+        </p:txBody>
       </p:sp>
       <p:sp>
         <p:nvSpPr>
@@ -5897,6 +6097,10 @@
             <a:prstDash val="solid"/>
           </a:ln>
         </p:spPr>
+        <p:txBody>
+          <a:bodyPr/>
+          <a:p/>
+        </p:txBody>
       </p:sp>
       <p:sp>
         <p:nvSpPr>
@@ -6053,6 +6257,10 @@
             <a:prstDash val="solid"/>
           </a:ln>
         </p:spPr>
+        <p:txBody>
+          <a:bodyPr/>
+          <a:p/>
+        </p:txBody>
       </p:sp>
       <p:sp>
         <p:nvSpPr>
@@ -6209,6 +6417,10 @@
             <a:prstDash val="solid"/>
           </a:ln>
         </p:spPr>
+        <p:txBody>
+          <a:bodyPr/>
+          <a:p/>
+        </p:txBody>
       </p:sp>
       <p:sp>
         <p:nvSpPr>
@@ -6365,6 +6577,10 @@
             <a:prstDash val="solid"/>
           </a:ln>
         </p:spPr>
+        <p:txBody>
+          <a:bodyPr/>
+          <a:p/>
+        </p:txBody>
       </p:sp>
       <p:sp>
         <p:nvSpPr>
@@ -6519,6 +6735,10 @@
             <a:prstDash val="solid"/>
           </a:ln>
         </p:spPr>
+        <p:txBody>
+          <a:bodyPr/>
+          <a:p/>
+        </p:txBody>
       </p:sp>
       <p:sp>
         <p:nvSpPr>
@@ -6583,6 +6803,10 @@
             <a:prstDash val="solid"/>
           </a:ln>
         </p:spPr>
+        <p:txBody>
+          <a:bodyPr/>
+          <a:p/>
+        </p:txBody>
       </p:sp>
       <p:sp>
         <p:nvSpPr>
@@ -6686,6 +6910,10 @@
             <a:prstDash val="solid"/>
           </a:ln>
         </p:spPr>
+        <p:txBody>
+          <a:bodyPr/>
+          <a:p/>
+        </p:txBody>
       </p:sp>
       <p:sp>
         <p:nvSpPr>
@@ -6784,6 +7012,10 @@
             <a:prstDash val="solid"/>
           </a:ln>
         </p:spPr>
+        <p:txBody>
+          <a:bodyPr/>
+          <a:p/>
+        </p:txBody>
       </p:sp>
       <p:sp>
         <p:nvSpPr>
@@ -6818,7 +7050,7 @@
                 <a:ea typeface="Microsoft YaHei" pitchFamily="34" charset="-122"/>
                 <a:cs typeface="Microsoft YaHei" pitchFamily="34" charset="-120"/>
               </a:rPr>
-              <a:t>连接件实例：减少螺栓螺纹缺陷率（从 3.2% 降至 &lt;0.5%）</a:t>
+              <a:t>连接件实例：减少工件尺寸缺陷率（从 3.2% 降至 &lt;0.5%）</a:t>
             </a:r>
             <a:endParaRPr lang="en-US" sz="1100" dirty="0"/>
           </a:p>
@@ -6850,6 +7082,10 @@
             <a:prstDash val="solid"/>
           </a:ln>
         </p:spPr>
+        <p:txBody>
+          <a:bodyPr/>
+          <a:p/>
+        </p:txBody>
       </p:sp>
       <p:sp>
         <p:nvSpPr>
@@ -6916,6 +7152,10 @@
             <a:prstDash val="solid"/>
           </a:ln>
         </p:spPr>
+        <p:txBody>
+          <a:bodyPr/>
+          <a:p/>
+        </p:txBody>
       </p:sp>
       <p:sp>
         <p:nvSpPr>
@@ -6950,7 +7190,7 @@
                 <a:ea typeface="Microsoft YaHei" pitchFamily="34" charset="-122"/>
                 <a:cs typeface="Microsoft YaHei" pitchFamily="34" charset="-120"/>
               </a:rPr>
-              <a:t>DO: 调整攻牙速度/更换丝锥材质试跑</a:t>
+              <a:t>DO: 调整精加工速度/更换刀具材质试跑</a:t>
             </a:r>
             <a:endParaRPr lang="en-US" sz="900" dirty="0"/>
           </a:p>
@@ -6982,6 +7222,10 @@
             <a:prstDash val="solid"/>
           </a:ln>
         </p:spPr>
+        <p:txBody>
+          <a:bodyPr/>
+          <a:p/>
+        </p:txBody>
       </p:sp>
       <p:sp>
         <p:nvSpPr>
@@ -7048,6 +7292,10 @@
             <a:prstDash val="solid"/>
           </a:ln>
         </p:spPr>
+        <p:txBody>
+          <a:bodyPr/>
+          <a:p/>
+        </p:txBody>
       </p:sp>
       <p:sp>
         <p:nvSpPr>
@@ -7183,6 +7431,10 @@
             <a:prstDash val="solid"/>
           </a:ln>
         </p:spPr>
+        <p:txBody>
+          <a:bodyPr/>
+          <a:p/>
+        </p:txBody>
       </p:sp>
       <p:sp>
         <p:nvSpPr>
@@ -7208,6 +7460,10 @@
             <a:prstDash val="solid"/>
           </a:ln>
         </p:spPr>
+        <p:txBody>
+          <a:bodyPr/>
+          <a:p/>
+        </p:txBody>
       </p:sp>
       <p:sp>
         <p:nvSpPr>
@@ -7311,6 +7567,10 @@
             <a:prstDash val="solid"/>
           </a:ln>
         </p:spPr>
+        <p:txBody>
+          <a:bodyPr/>
+          <a:p/>
+        </p:txBody>
       </p:sp>
       <p:sp>
         <p:nvSpPr>
@@ -7377,6 +7637,10 @@
             <a:prstDash val="solid"/>
           </a:ln>
         </p:spPr>
+        <p:txBody>
+          <a:bodyPr/>
+          <a:p/>
+        </p:txBody>
       </p:sp>
       <p:sp>
         <p:nvSpPr>
@@ -7443,6 +7707,10 @@
             <a:prstDash val="solid"/>
           </a:ln>
         </p:spPr>
+        <p:txBody>
+          <a:bodyPr/>
+          <a:p/>
+        </p:txBody>
       </p:sp>
       <p:sp>
         <p:nvSpPr>
@@ -7619,6 +7887,10 @@
             <a:prstDash val="solid"/>
           </a:ln>
         </p:spPr>
+        <p:txBody>
+          <a:bodyPr/>
+          <a:p/>
+        </p:txBody>
       </p:sp>
       <p:sp>
         <p:nvSpPr>
@@ -7646,6 +7918,10 @@
             <a:prstDash val="solid"/>
           </a:ln>
         </p:spPr>
+        <p:txBody>
+          <a:bodyPr/>
+          <a:p/>
+        </p:txBody>
       </p:sp>
       <p:sp>
         <p:nvSpPr>
@@ -7822,6 +8098,10 @@
             <a:prstDash val="solid"/>
           </a:ln>
         </p:spPr>
+        <p:txBody>
+          <a:bodyPr/>
+          <a:p/>
+        </p:txBody>
       </p:sp>
       <p:sp>
         <p:nvSpPr>
@@ -7849,6 +8129,10 @@
             <a:prstDash val="solid"/>
           </a:ln>
         </p:spPr>
+        <p:txBody>
+          <a:bodyPr/>
+          <a:p/>
+        </p:txBody>
       </p:sp>
       <p:sp>
         <p:nvSpPr>
@@ -8025,6 +8309,10 @@
             <a:prstDash val="solid"/>
           </a:ln>
         </p:spPr>
+        <p:txBody>
+          <a:bodyPr/>
+          <a:p/>
+        </p:txBody>
       </p:sp>
       <p:sp>
         <p:nvSpPr>
@@ -8052,6 +8340,10 @@
             <a:prstDash val="solid"/>
           </a:ln>
         </p:spPr>
+        <p:txBody>
+          <a:bodyPr/>
+          <a:p/>
+        </p:txBody>
       </p:sp>
       <p:sp>
         <p:nvSpPr>
@@ -8228,6 +8520,10 @@
             <a:prstDash val="solid"/>
           </a:ln>
         </p:spPr>
+        <p:txBody>
+          <a:bodyPr/>
+          <a:p/>
+        </p:txBody>
       </p:sp>
       <p:sp>
         <p:nvSpPr>
@@ -8255,6 +8551,10 @@
             <a:prstDash val="solid"/>
           </a:ln>
         </p:spPr>
+        <p:txBody>
+          <a:bodyPr/>
+          <a:p/>
+        </p:txBody>
       </p:sp>
       <p:sp>
         <p:nvSpPr>
@@ -8431,6 +8731,10 @@
             <a:prstDash val="solid"/>
           </a:ln>
         </p:spPr>
+        <p:txBody>
+          <a:bodyPr/>
+          <a:p/>
+        </p:txBody>
       </p:sp>
       <p:sp>
         <p:nvSpPr>
@@ -8495,6 +8799,10 @@
             <a:prstDash val="solid"/>
           </a:ln>
         </p:spPr>
+        <p:txBody>
+          <a:bodyPr/>
+          <a:p/>
+        </p:txBody>
       </p:sp>
       <p:sp>
         <p:nvSpPr>
@@ -8637,6 +8945,10 @@
             <a:prstDash val="solid"/>
           </a:ln>
         </p:spPr>
+        <p:txBody>
+          <a:bodyPr/>
+          <a:p/>
+        </p:txBody>
       </p:sp>
       <p:sp>
         <p:nvSpPr>
@@ -8779,6 +9091,10 @@
             <a:prstDash val="solid"/>
           </a:ln>
         </p:spPr>
+        <p:txBody>
+          <a:bodyPr/>
+          <a:p/>
+        </p:txBody>
       </p:sp>
       <p:sp>
         <p:nvSpPr>
@@ -8921,6 +9237,10 @@
             <a:prstDash val="solid"/>
           </a:ln>
         </p:spPr>
+        <p:txBody>
+          <a:bodyPr/>
+          <a:p/>
+        </p:txBody>
       </p:sp>
       <p:sp>
         <p:nvSpPr>
@@ -9063,6 +9383,10 @@
             <a:prstDash val="solid"/>
           </a:ln>
         </p:spPr>
+        <p:txBody>
+          <a:bodyPr/>
+          <a:p/>
+        </p:txBody>
       </p:sp>
       <p:sp>
         <p:nvSpPr>
@@ -9205,6 +9529,10 @@
             <a:prstDash val="solid"/>
           </a:ln>
         </p:spPr>
+        <p:txBody>
+          <a:bodyPr/>
+          <a:p/>
+        </p:txBody>
       </p:sp>
       <p:sp>
         <p:nvSpPr>
@@ -9388,6 +9716,10 @@
             <a:prstDash val="solid"/>
           </a:ln>
         </p:spPr>
+        <p:txBody>
+          <a:bodyPr/>
+          <a:p/>
+        </p:txBody>
       </p:sp>
       <p:sp>
         <p:nvSpPr>
@@ -9422,7 +9754,7 @@
                 <a:ea typeface="Microsoft YaHei" pitchFamily="34" charset="-122"/>
                 <a:cs typeface="Microsoft YaHei" pitchFamily="34" charset="-120"/>
               </a:rPr>
-              <a:t>冷镦机 OEE 提升：D(OEE&lt;60%) -&gt; M(数据采集30天) -&gt; A(停机分析找TOP5) -&gt; I(快速换模+预防保养) -&gt; C(SPC监控稳定&gt;85%)</a:t>
+              <a:t>机加工设备 OEE 提升：D(OEE&lt;60%) -&gt; M(数据采集30天) -&gt; A(停机分析找TOP5) -&gt; I(快速换模+预防保养) -&gt; C(SPC监控稳定&gt;85%)</a:t>
             </a:r>
             <a:endParaRPr lang="en-US" sz="1000" dirty="0"/>
           </a:p>
@@ -9484,6 +9816,10 @@
             <a:prstDash val="solid"/>
           </a:ln>
         </p:spPr>
+        <p:txBody>
+          <a:bodyPr/>
+          <a:p/>
+        </p:txBody>
       </p:sp>
       <p:sp>
         <p:nvSpPr>
@@ -9509,6 +9845,10 @@
             <a:prstDash val="solid"/>
           </a:ln>
         </p:spPr>
+        <p:txBody>
+          <a:bodyPr/>
+          <a:p/>
+        </p:txBody>
       </p:sp>
       <p:sp>
         <p:nvSpPr>
@@ -9612,6 +9952,10 @@
             <a:prstDash val="solid"/>
           </a:ln>
         </p:spPr>
+        <p:txBody>
+          <a:bodyPr/>
+          <a:p/>
+        </p:txBody>
       </p:sp>
       <p:sp>
         <p:nvSpPr>
@@ -9678,6 +10022,10 @@
             <a:prstDash val="solid"/>
           </a:ln>
         </p:spPr>
+        <p:txBody>
+          <a:bodyPr/>
+          <a:p/>
+        </p:txBody>
       </p:sp>
       <p:sp>
         <p:nvSpPr>
@@ -9742,6 +10090,10 @@
             <a:prstDash val="solid"/>
           </a:ln>
         </p:spPr>
+        <p:txBody>
+          <a:bodyPr/>
+          <a:p/>
+        </p:txBody>
       </p:sp>
       <p:sp>
         <p:nvSpPr>
@@ -9767,6 +10119,10 @@
             <a:prstDash val="solid"/>
           </a:ln>
         </p:spPr>
+        <p:txBody>
+          <a:bodyPr/>
+          <a:p/>
+        </p:txBody>
       </p:sp>
       <p:sp>
         <p:nvSpPr>
@@ -9792,6 +10148,10 @@
             <a:prstDash val="solid"/>
           </a:ln>
         </p:spPr>
+        <p:txBody>
+          <a:bodyPr/>
+          <a:p/>
+        </p:txBody>
       </p:sp>
       <p:sp>
         <p:nvSpPr>
@@ -9992,6 +10352,10 @@
             <a:prstDash val="solid"/>
           </a:ln>
         </p:spPr>
+        <p:txBody>
+          <a:bodyPr/>
+          <a:p/>
+        </p:txBody>
       </p:sp>
       <p:sp>
         <p:nvSpPr>
@@ -10146,6 +10510,10 @@
             <a:prstDash val="solid"/>
           </a:ln>
         </p:spPr>
+        <p:txBody>
+          <a:bodyPr/>
+          <a:p/>
+        </p:txBody>
       </p:sp>
       <p:sp>
         <p:nvSpPr>
@@ -10173,6 +10541,10 @@
             <a:prstDash val="solid"/>
           </a:ln>
         </p:spPr>
+        <p:txBody>
+          <a:bodyPr/>
+          <a:p/>
+        </p:txBody>
       </p:sp>
       <p:sp>
         <p:nvSpPr>
@@ -10327,6 +10699,10 @@
             <a:prstDash val="solid"/>
           </a:ln>
         </p:spPr>
+        <p:txBody>
+          <a:bodyPr/>
+          <a:p/>
+        </p:txBody>
       </p:sp>
       <p:sp>
         <p:nvSpPr>
@@ -10354,6 +10730,10 @@
             <a:prstDash val="solid"/>
           </a:ln>
         </p:spPr>
+        <p:txBody>
+          <a:bodyPr/>
+          <a:p/>
+        </p:txBody>
       </p:sp>
       <p:sp>
         <p:nvSpPr>
@@ -10508,6 +10888,10 @@
             <a:prstDash val="solid"/>
           </a:ln>
         </p:spPr>
+        <p:txBody>
+          <a:bodyPr/>
+          <a:p/>
+        </p:txBody>
       </p:sp>
       <p:sp>
         <p:nvSpPr>
@@ -10535,6 +10919,10 @@
             <a:prstDash val="solid"/>
           </a:ln>
         </p:spPr>
+        <p:txBody>
+          <a:bodyPr/>
+          <a:p/>
+        </p:txBody>
       </p:sp>
       <p:sp>
         <p:nvSpPr>
@@ -10689,6 +11077,10 @@
             <a:prstDash val="solid"/>
           </a:ln>
         </p:spPr>
+        <p:txBody>
+          <a:bodyPr/>
+          <a:p/>
+        </p:txBody>
       </p:sp>
       <p:sp>
         <p:nvSpPr>
@@ -10716,6 +11108,10 @@
             <a:prstDash val="solid"/>
           </a:ln>
         </p:spPr>
+        <p:txBody>
+          <a:bodyPr/>
+          <a:p/>
+        </p:txBody>
       </p:sp>
       <p:sp>
         <p:nvSpPr>
@@ -10870,6 +11266,10 @@
             <a:prstDash val="solid"/>
           </a:ln>
         </p:spPr>
+        <p:txBody>
+          <a:bodyPr/>
+          <a:p/>
+        </p:txBody>
       </p:sp>
       <p:sp>
         <p:nvSpPr>
@@ -10934,6 +11334,10 @@
             <a:prstDash val="solid"/>
           </a:ln>
         </p:spPr>
+        <p:txBody>
+          <a:bodyPr/>
+          <a:p/>
+        </p:txBody>
       </p:sp>
       <p:sp>
         <p:nvSpPr>
@@ -11015,6 +11419,10 @@
             <a:prstDash val="solid"/>
           </a:ln>
         </p:spPr>
+        <p:txBody>
+          <a:bodyPr/>
+          <a:p/>
+        </p:txBody>
       </p:sp>
       <p:sp>
         <p:nvSpPr>
@@ -11096,6 +11504,10 @@
             <a:prstDash val="solid"/>
           </a:ln>
         </p:spPr>
+        <p:txBody>
+          <a:bodyPr/>
+          <a:p/>
+        </p:txBody>
       </p:sp>
       <p:sp>
         <p:nvSpPr>
@@ -11177,6 +11589,10 @@
             <a:prstDash val="solid"/>
           </a:ln>
         </p:spPr>
+        <p:txBody>
+          <a:bodyPr/>
+          <a:p/>
+        </p:txBody>
       </p:sp>
       <p:sp>
         <p:nvSpPr>
@@ -11297,6 +11713,10 @@
             <a:prstDash val="solid"/>
           </a:ln>
         </p:spPr>
+        <p:txBody>
+          <a:bodyPr/>
+          <a:p/>
+        </p:txBody>
       </p:sp>
       <p:sp>
         <p:nvSpPr>
@@ -11322,6 +11742,10 @@
             <a:prstDash val="solid"/>
           </a:ln>
         </p:spPr>
+        <p:txBody>
+          <a:bodyPr/>
+          <a:p/>
+        </p:txBody>
       </p:sp>
       <p:sp>
         <p:nvSpPr>
@@ -11347,6 +11771,10 @@
             <a:prstDash val="solid"/>
           </a:ln>
         </p:spPr>
+        <p:txBody>
+          <a:bodyPr/>
+          <a:p/>
+        </p:txBody>
       </p:sp>
       <p:sp>
         <p:nvSpPr>
@@ -11381,7 +11809,7 @@
                 <a:ea typeface="Microsoft YaHei" pitchFamily="34" charset="-122"/>
                 <a:cs typeface="Microsoft YaHei" pitchFamily="34" charset="-120"/>
               </a:rPr>
-              <a:t>螺栓材料替代 VA/VE 实例</a:t>
+              <a:t>工件材料替代 VA/VE 实例</a:t>
             </a:r>
             <a:endParaRPr lang="en-US" sz="1200" dirty="0"/>
           </a:p>
@@ -11420,7 +11848,7 @@
                 <a:ea typeface="Microsoft YaHei" pitchFamily="34" charset="-122"/>
                 <a:cs typeface="Microsoft YaHei" pitchFamily="34" charset="-120"/>
               </a:rPr>
-              <a:t>Q: 304不锈钢螺栓能否替换？</a:t>
+              <a:t>Q: 304不锈钢工件能否替换？</a:t>
             </a:r>
             <a:endParaRPr lang="en-US" sz="1000" dirty="0"/>
           </a:p>
@@ -11772,6 +12200,10 @@
             <a:prstDash val="solid"/>
           </a:ln>
         </p:spPr>
+        <p:txBody>
+          <a:bodyPr/>
+          <a:p/>
+        </p:txBody>
       </p:sp>
       <p:sp>
         <p:nvSpPr>
@@ -11797,6 +12229,10 @@
             <a:prstDash val="solid"/>
           </a:ln>
         </p:spPr>
+        <p:txBody>
+          <a:bodyPr/>
+          <a:p/>
+        </p:txBody>
       </p:sp>
       <p:sp>
         <p:nvSpPr>
@@ -11900,6 +12336,10 @@
             <a:prstDash val="solid"/>
           </a:ln>
         </p:spPr>
+        <p:txBody>
+          <a:bodyPr/>
+          <a:p/>
+        </p:txBody>
       </p:sp>
       <p:sp>
         <p:nvSpPr>
@@ -11966,6 +12406,10 @@
             <a:prstDash val="solid"/>
           </a:ln>
         </p:spPr>
+        <p:txBody>
+          <a:bodyPr/>
+          <a:p/>
+        </p:txBody>
       </p:sp>
       <p:sp>
         <p:nvSpPr>
@@ -12030,6 +12474,10 @@
             <a:prstDash val="solid"/>
           </a:ln>
         </p:spPr>
+        <p:txBody>
+          <a:bodyPr/>
+          <a:p/>
+        </p:txBody>
       </p:sp>
       <p:sp>
         <p:nvSpPr>
@@ -12094,6 +12542,10 @@
             <a:prstDash val="solid"/>
           </a:ln>
         </p:spPr>
+        <p:txBody>
+          <a:bodyPr/>
+          <a:p/>
+        </p:txBody>
       </p:sp>
       <p:sp>
         <p:nvSpPr>
@@ -12158,6 +12610,10 @@
             <a:prstDash val="solid"/>
           </a:ln>
         </p:spPr>
+        <p:txBody>
+          <a:bodyPr/>
+          <a:p/>
+        </p:txBody>
       </p:sp>
       <p:sp>
         <p:nvSpPr>
@@ -12222,6 +12678,10 @@
             <a:prstDash val="solid"/>
           </a:ln>
         </p:spPr>
+        <p:txBody>
+          <a:bodyPr/>
+          <a:p/>
+        </p:txBody>
       </p:sp>
       <p:sp>
         <p:nvSpPr>
@@ -12286,6 +12746,10 @@
             <a:prstDash val="solid"/>
           </a:ln>
         </p:spPr>
+        <p:txBody>
+          <a:bodyPr/>
+          <a:p/>
+        </p:txBody>
       </p:sp>
       <p:sp>
         <p:nvSpPr>
@@ -12350,6 +12814,10 @@
             <a:prstDash val="solid"/>
           </a:ln>
         </p:spPr>
+        <p:txBody>
+          <a:bodyPr/>
+          <a:p/>
+        </p:txBody>
       </p:sp>
       <p:sp>
         <p:nvSpPr>
@@ -12414,6 +12882,10 @@
             <a:prstDash val="solid"/>
           </a:ln>
         </p:spPr>
+        <p:txBody>
+          <a:bodyPr/>
+          <a:p/>
+        </p:txBody>
       </p:sp>
       <p:sp>
         <p:nvSpPr>
@@ -12478,6 +12950,10 @@
             <a:prstDash val="solid"/>
           </a:ln>
         </p:spPr>
+        <p:txBody>
+          <a:bodyPr/>
+          <a:p/>
+        </p:txBody>
       </p:sp>
       <p:sp>
         <p:nvSpPr>
@@ -12542,6 +13018,10 @@
             <a:prstDash val="solid"/>
           </a:ln>
         </p:spPr>
+        <p:txBody>
+          <a:bodyPr/>
+          <a:p/>
+        </p:txBody>
       </p:sp>
       <p:sp>
         <p:nvSpPr>
@@ -12606,6 +13086,10 @@
             <a:prstDash val="solid"/>
           </a:ln>
         </p:spPr>
+        <p:txBody>
+          <a:bodyPr/>
+          <a:p/>
+        </p:txBody>
       </p:sp>
       <p:sp>
         <p:nvSpPr>
@@ -12670,6 +13154,10 @@
             <a:prstDash val="solid"/>
           </a:ln>
         </p:spPr>
+        <p:txBody>
+          <a:bodyPr/>
+          <a:p/>
+        </p:txBody>
       </p:sp>
       <p:sp>
         <p:nvSpPr>
@@ -12734,6 +13222,10 @@
             <a:prstDash val="solid"/>
           </a:ln>
         </p:spPr>
+        <p:txBody>
+          <a:bodyPr/>
+          <a:p/>
+        </p:txBody>
       </p:sp>
       <p:sp>
         <p:nvSpPr>
@@ -12798,6 +13290,10 @@
             <a:prstDash val="solid"/>
           </a:ln>
         </p:spPr>
+        <p:txBody>
+          <a:bodyPr/>
+          <a:p/>
+        </p:txBody>
       </p:sp>
       <p:sp>
         <p:nvSpPr>
@@ -12862,6 +13358,10 @@
             <a:prstDash val="solid"/>
           </a:ln>
         </p:spPr>
+        <p:txBody>
+          <a:bodyPr/>
+          <a:p/>
+        </p:txBody>
       </p:sp>
       <p:sp>
         <p:nvSpPr>
@@ -12926,6 +13426,10 @@
             <a:prstDash val="solid"/>
           </a:ln>
         </p:spPr>
+        <p:txBody>
+          <a:bodyPr/>
+          <a:p/>
+        </p:txBody>
       </p:sp>
       <p:sp>
         <p:nvSpPr>
@@ -12990,6 +13494,10 @@
             <a:prstDash val="solid"/>
           </a:ln>
         </p:spPr>
+        <p:txBody>
+          <a:bodyPr/>
+          <a:p/>
+        </p:txBody>
       </p:sp>
       <p:sp>
         <p:nvSpPr>
@@ -13054,6 +13562,10 @@
             <a:prstDash val="solid"/>
           </a:ln>
         </p:spPr>
+        <p:txBody>
+          <a:bodyPr/>
+          <a:p/>
+        </p:txBody>
       </p:sp>
       <p:sp>
         <p:nvSpPr>
@@ -13118,6 +13630,10 @@
             <a:prstDash val="solid"/>
           </a:ln>
         </p:spPr>
+        <p:txBody>
+          <a:bodyPr/>
+          <a:p/>
+        </p:txBody>
       </p:sp>
       <p:sp>
         <p:nvSpPr>
@@ -13182,6 +13698,10 @@
             <a:prstDash val="solid"/>
           </a:ln>
         </p:spPr>
+        <p:txBody>
+          <a:bodyPr/>
+          <a:p/>
+        </p:txBody>
       </p:sp>
       <p:sp>
         <p:nvSpPr>
@@ -13246,6 +13766,10 @@
             <a:prstDash val="solid"/>
           </a:ln>
         </p:spPr>
+        <p:txBody>
+          <a:bodyPr/>
+          <a:p/>
+        </p:txBody>
       </p:sp>
       <p:sp>
         <p:nvSpPr>
@@ -13310,6 +13834,10 @@
             <a:prstDash val="solid"/>
           </a:ln>
         </p:spPr>
+        <p:txBody>
+          <a:bodyPr/>
+          <a:p/>
+        </p:txBody>
       </p:sp>
       <p:sp>
         <p:nvSpPr>
@@ -13374,6 +13902,10 @@
             <a:prstDash val="solid"/>
           </a:ln>
         </p:spPr>
+        <p:txBody>
+          <a:bodyPr/>
+          <a:p/>
+        </p:txBody>
       </p:sp>
       <p:sp>
         <p:nvSpPr>
@@ -13438,6 +13970,10 @@
             <a:prstDash val="solid"/>
           </a:ln>
         </p:spPr>
+        <p:txBody>
+          <a:bodyPr/>
+          <a:p/>
+        </p:txBody>
       </p:sp>
       <p:sp>
         <p:nvSpPr>
@@ -13502,6 +14038,10 @@
             <a:prstDash val="solid"/>
           </a:ln>
         </p:spPr>
+        <p:txBody>
+          <a:bodyPr/>
+          <a:p/>
+        </p:txBody>
       </p:sp>
       <p:sp>
         <p:nvSpPr>
@@ -13566,6 +14106,10 @@
             <a:prstDash val="solid"/>
           </a:ln>
         </p:spPr>
+        <p:txBody>
+          <a:bodyPr/>
+          <a:p/>
+        </p:txBody>
       </p:sp>
       <p:sp>
         <p:nvSpPr>
@@ -13630,6 +14174,10 @@
             <a:prstDash val="solid"/>
           </a:ln>
         </p:spPr>
+        <p:txBody>
+          <a:bodyPr/>
+          <a:p/>
+        </p:txBody>
       </p:sp>
       <p:sp>
         <p:nvSpPr>
@@ -13694,6 +14242,10 @@
             <a:prstDash val="solid"/>
           </a:ln>
         </p:spPr>
+        <p:txBody>
+          <a:bodyPr/>
+          <a:p/>
+        </p:txBody>
       </p:sp>
       <p:sp>
         <p:nvSpPr>
@@ -13758,6 +14310,10 @@
             <a:prstDash val="solid"/>
           </a:ln>
         </p:spPr>
+        <p:txBody>
+          <a:bodyPr/>
+          <a:p/>
+        </p:txBody>
       </p:sp>
       <p:sp>
         <p:nvSpPr>
@@ -13822,6 +14378,10 @@
             <a:prstDash val="solid"/>
           </a:ln>
         </p:spPr>
+        <p:txBody>
+          <a:bodyPr/>
+          <a:p/>
+        </p:txBody>
       </p:sp>
       <p:sp>
         <p:nvSpPr>
@@ -13886,6 +14446,10 @@
             <a:prstDash val="solid"/>
           </a:ln>
         </p:spPr>
+        <p:txBody>
+          <a:bodyPr/>
+          <a:p/>
+        </p:txBody>
       </p:sp>
       <p:sp>
         <p:nvSpPr>
@@ -13950,6 +14514,10 @@
             <a:prstDash val="solid"/>
           </a:ln>
         </p:spPr>
+        <p:txBody>
+          <a:bodyPr/>
+          <a:p/>
+        </p:txBody>
       </p:sp>
       <p:sp>
         <p:nvSpPr>
@@ -14014,6 +14582,10 @@
             <a:prstDash val="solid"/>
           </a:ln>
         </p:spPr>
+        <p:txBody>
+          <a:bodyPr/>
+          <a:p/>
+        </p:txBody>
       </p:sp>
       <p:sp>
         <p:nvSpPr>
@@ -14048,7 +14620,7 @@
                 <a:ea typeface="Microsoft YaHei" pitchFamily="34" charset="-122"/>
                 <a:cs typeface="Microsoft YaHei" pitchFamily="34" charset="-120"/>
               </a:rPr>
-              <a:t>攻牙缺陷率上升</a:t>
+              <a:t>精加工缺陷率上升</a:t>
             </a:r>
             <a:endParaRPr lang="en-US" sz="900" dirty="0"/>
           </a:p>
@@ -14078,6 +14650,10 @@
             <a:prstDash val="solid"/>
           </a:ln>
         </p:spPr>
+        <p:txBody>
+          <a:bodyPr/>
+          <a:p/>
+        </p:txBody>
       </p:sp>
       <p:sp>
         <p:nvSpPr>
@@ -14112,7 +14688,7 @@
                 <a:ea typeface="Microsoft YaHei" pitchFamily="34" charset="-122"/>
                 <a:cs typeface="Microsoft YaHei" pitchFamily="34" charset="-120"/>
               </a:rPr>
-              <a:t>冷镦机 OEE 降低</a:t>
+              <a:t>机加工设备 OEE 降低</a:t>
             </a:r>
             <a:endParaRPr lang="en-US" sz="900" dirty="0"/>
           </a:p>
@@ -14142,6 +14718,10 @@
             <a:prstDash val="solid"/>
           </a:ln>
         </p:spPr>
+        <p:txBody>
+          <a:bodyPr/>
+          <a:p/>
+        </p:txBody>
       </p:sp>
       <p:sp>
         <p:nvSpPr>
@@ -14206,6 +14786,10 @@
             <a:prstDash val="solid"/>
           </a:ln>
         </p:spPr>
+        <p:txBody>
+          <a:bodyPr/>
+          <a:p/>
+        </p:txBody>
       </p:sp>
       <p:sp>
         <p:nvSpPr>
@@ -14240,7 +14824,7 @@
                 <a:ea typeface="Microsoft YaHei" pitchFamily="34" charset="-122"/>
                 <a:cs typeface="Microsoft YaHei" pitchFamily="34" charset="-120"/>
               </a:rPr>
-              <a:t>螺栓材料降本</a:t>
+              <a:t>工件材料降本</a:t>
             </a:r>
             <a:endParaRPr lang="en-US" sz="900" dirty="0"/>
           </a:p>
@@ -14270,6 +14854,10 @@
             <a:prstDash val="solid"/>
           </a:ln>
         </p:spPr>
+        <p:txBody>
+          <a:bodyPr/>
+          <a:p/>
+        </p:txBody>
       </p:sp>
       <p:sp>
         <p:nvSpPr>
@@ -14334,6 +14922,10 @@
             <a:prstDash val="solid"/>
           </a:ln>
         </p:spPr>
+        <p:txBody>
+          <a:bodyPr/>
+          <a:p/>
+        </p:txBody>
       </p:sp>
       <p:sp>
         <p:nvSpPr>
@@ -14417,6 +15009,10 @@
             <a:prstDash val="solid"/>
           </a:ln>
         </p:spPr>
+        <p:txBody>
+          <a:bodyPr/>
+          <a:p/>
+        </p:txBody>
       </p:sp>
       <p:sp>
         <p:nvSpPr>
@@ -14500,6 +15096,10 @@
             <a:prstDash val="solid"/>
           </a:ln>
         </p:spPr>
+        <p:txBody>
+          <a:bodyPr/>
+          <a:p/>
+        </p:txBody>
       </p:sp>
       <p:sp>
         <p:nvSpPr>
@@ -14583,6 +15183,10 @@
             <a:prstDash val="solid"/>
           </a:ln>
         </p:spPr>
+        <p:txBody>
+          <a:bodyPr/>
+          <a:p/>
+        </p:txBody>
       </p:sp>
       <p:sp>
         <p:nvSpPr>
@@ -14666,6 +15270,10 @@
             <a:prstDash val="solid"/>
           </a:ln>
         </p:spPr>
+        <p:txBody>
+          <a:bodyPr/>
+          <a:p/>
+        </p:txBody>
       </p:sp>
       <p:sp>
         <p:nvSpPr>
@@ -14857,6 +15465,10 @@
             <a:prstDash val="solid"/>
           </a:ln>
         </p:spPr>
+        <p:txBody>
+          <a:bodyPr/>
+          <a:p/>
+        </p:txBody>
       </p:sp>
       <p:sp>
         <p:nvSpPr>
@@ -14882,6 +15494,10 @@
             <a:prstDash val="solid"/>
           </a:ln>
         </p:spPr>
+        <p:txBody>
+          <a:bodyPr/>
+          <a:p/>
+        </p:txBody>
       </p:sp>
       <p:sp>
         <p:nvSpPr>
@@ -14955,7 +15571,7 @@
                 <a:ea typeface="Microsoft YaHei" pitchFamily="34" charset="-122"/>
                 <a:cs typeface="Microsoft YaHei" pitchFamily="34" charset="-120"/>
               </a:rPr>
-              <a:t>End-to-End Problem Solving in Fastener Manufacturing</a:t>
+              <a:t>End-to-End Problem Solving in Discrete Manufacturing</a:t>
             </a:r>
             <a:endParaRPr lang="en-US" sz="1400" dirty="0"/>
           </a:p>
@@ -14985,6 +15601,10 @@
             <a:prstDash val="solid"/>
           </a:ln>
         </p:spPr>
+        <p:txBody>
+          <a:bodyPr/>
+          <a:p/>
+        </p:txBody>
       </p:sp>
       <p:sp>
         <p:nvSpPr>
@@ -15051,6 +15671,10 @@
             <a:prstDash val="solid"/>
           </a:ln>
         </p:spPr>
+        <p:txBody>
+          <a:bodyPr/>
+          <a:p/>
+        </p:txBody>
       </p:sp>
       <p:sp>
         <p:nvSpPr>
@@ -15115,6 +15739,10 @@
             <a:prstDash val="solid"/>
           </a:ln>
         </p:spPr>
+        <p:txBody>
+          <a:bodyPr/>
+          <a:p/>
+        </p:txBody>
       </p:sp>
       <p:sp>
         <p:nvSpPr>
@@ -15140,6 +15768,10 @@
             <a:prstDash val="solid"/>
           </a:ln>
         </p:spPr>
+        <p:txBody>
+          <a:bodyPr/>
+          <a:p/>
+        </p:txBody>
       </p:sp>
       <p:sp>
         <p:nvSpPr>
@@ -15165,6 +15797,10 @@
             <a:prstDash val="solid"/>
           </a:ln>
         </p:spPr>
+        <p:txBody>
+          <a:bodyPr/>
+          <a:p/>
+        </p:txBody>
       </p:sp>
       <p:sp>
         <p:nvSpPr>
@@ -15199,7 +15835,7 @@
                 <a:ea typeface="Microsoft YaHei" pitchFamily="34" charset="-122"/>
                 <a:cs typeface="Microsoft YaHei" pitchFamily="34" charset="-120"/>
               </a:rPr>
-              <a:t>案例背景：M12 高强螺栓的螺纹缺陷率从 1.2% 突增至 5.8%，客户投诉 3 起</a:t>
+              <a:t>案例背景：某型号 高强工件的尺寸缺陷率从 1.2% 突增至 5.8%，客户投诉 3 起</a:t>
             </a:r>
             <a:endParaRPr lang="en-US" sz="1200" dirty="0"/>
           </a:p>
@@ -15238,7 +15874,7 @@
                 <a:ea typeface="Microsoft YaHei" pitchFamily="34" charset="-122"/>
                 <a:cs typeface="Microsoft YaHei" pitchFamily="34" charset="-120"/>
               </a:rPr>
-              <a:t>挑战：根因不明 | 紧急恢复产能 | 防止复发 | 涉及冷镦-攻牙-热处理三道工序</a:t>
+              <a:t>挑战：根因不明 | 紧急恢复产能 | 防止复发 | 涉及机加工-精加工-热处理三道工序</a:t>
             </a:r>
             <a:endParaRPr lang="en-US" sz="1000" dirty="0"/>
           </a:p>
@@ -15270,6 +15906,10 @@
             <a:prstDash val="solid"/>
           </a:ln>
         </p:spPr>
+        <p:txBody>
+          <a:bodyPr/>
+          <a:p/>
+        </p:txBody>
       </p:sp>
       <p:sp>
         <p:nvSpPr>
@@ -15416,7 +16056,7 @@
                 <a:ea typeface="Microsoft YaHei" pitchFamily="34" charset="-122"/>
                 <a:cs typeface="Microsoft YaHei" pitchFamily="34" charset="-120"/>
               </a:rPr>
-              <a:t>冷镦车间首件检查</a:t>
+              <a:t>机加工车间首件检查</a:t>
             </a:r>
             <a:endParaRPr lang="en-US" sz="750" dirty="0"/>
           </a:p>
@@ -15433,7 +16073,7 @@
                 <a:ea typeface="Microsoft YaHei" pitchFamily="34" charset="-122"/>
                 <a:cs typeface="Microsoft YaHei" pitchFamily="34" charset="-120"/>
               </a:rPr>
-              <a:t>发现螺纹烂牙频次增加</a:t>
+              <a:t>发现表面烂纹频次增加</a:t>
             </a:r>
             <a:endParaRPr lang="en-US" sz="750" dirty="0"/>
           </a:p>
@@ -15450,7 +16090,7 @@
                 <a:ea typeface="Microsoft YaHei" pitchFamily="34" charset="-122"/>
                 <a:cs typeface="Microsoft YaHei" pitchFamily="34" charset="-120"/>
               </a:rPr>
-              <a:t>操作员反馈丝锥磨损快</a:t>
+              <a:t>操作员反馈刀具磨损快</a:t>
             </a:r>
             <a:endParaRPr lang="en-US" sz="750" dirty="0"/>
           </a:p>
@@ -15480,6 +16120,10 @@
             <a:prstDash val="solid"/>
           </a:ln>
         </p:spPr>
+        <p:txBody>
+          <a:bodyPr/>
+          <a:p/>
+        </p:txBody>
       </p:sp>
       <p:sp>
         <p:nvSpPr>
@@ -15507,6 +16151,10 @@
             <a:prstDash val="solid"/>
           </a:ln>
         </p:spPr>
+        <p:txBody>
+          <a:bodyPr/>
+          <a:p/>
+        </p:txBody>
       </p:sp>
       <p:sp>
         <p:nvSpPr>
@@ -15670,7 +16318,7 @@
                 <a:ea typeface="Microsoft YaHei" pitchFamily="34" charset="-122"/>
                 <a:cs typeface="Microsoft YaHei" pitchFamily="34" charset="-120"/>
               </a:rPr>
-              <a:t>划定攻牙工序为瓶颈</a:t>
+              <a:t>划定精加工工序为瓶颈</a:t>
             </a:r>
             <a:endParaRPr lang="en-US" sz="750" dirty="0"/>
           </a:p>
@@ -15717,6 +16365,10 @@
             <a:prstDash val="solid"/>
           </a:ln>
         </p:spPr>
+        <p:txBody>
+          <a:bodyPr/>
+          <a:p/>
+        </p:txBody>
       </p:sp>
       <p:sp>
         <p:nvSpPr>
@@ -15744,6 +16396,10 @@
             <a:prstDash val="solid"/>
           </a:ln>
         </p:spPr>
+        <p:txBody>
+          <a:bodyPr/>
+          <a:p/>
+        </p:txBody>
       </p:sp>
       <p:sp>
         <p:nvSpPr>
@@ -15890,7 +16546,7 @@
                 <a:ea typeface="Microsoft YaHei" pitchFamily="34" charset="-122"/>
                 <a:cs typeface="Microsoft YaHei" pitchFamily="34" charset="-120"/>
               </a:rPr>
-              <a:t>调整攻牙速度/频率</a:t>
+              <a:t>调整精加工速度/频率</a:t>
             </a:r>
             <a:endParaRPr lang="en-US" sz="750" dirty="0"/>
           </a:p>
@@ -15924,7 +16580,7 @@
                 <a:ea typeface="Microsoft YaHei" pitchFamily="34" charset="-122"/>
                 <a:cs typeface="Microsoft YaHei" pitchFamily="34" charset="-120"/>
               </a:rPr>
-              <a:t>验证丝锥更换周期</a:t>
+              <a:t>验证刀具更换周期</a:t>
             </a:r>
             <a:endParaRPr lang="en-US" sz="750" dirty="0"/>
           </a:p>
@@ -15954,6 +16610,10 @@
             <a:prstDash val="solid"/>
           </a:ln>
         </p:spPr>
+        <p:txBody>
+          <a:bodyPr/>
+          <a:p/>
+        </p:txBody>
       </p:sp>
       <p:sp>
         <p:nvSpPr>
@@ -15981,6 +16641,10 @@
             <a:prstDash val="solid"/>
           </a:ln>
         </p:spPr>
+        <p:txBody>
+          <a:bodyPr/>
+          <a:p/>
+        </p:txBody>
       </p:sp>
       <p:sp>
         <p:nvSpPr>
@@ -16191,6 +16855,10 @@
             <a:prstDash val="solid"/>
           </a:ln>
         </p:spPr>
+        <p:txBody>
+          <a:bodyPr/>
+          <a:p/>
+        </p:txBody>
       </p:sp>
       <p:sp>
         <p:nvSpPr>
@@ -16218,6 +16886,10 @@
             <a:prstDash val="solid"/>
           </a:ln>
         </p:spPr>
+        <p:txBody>
+          <a:bodyPr/>
+          <a:p/>
+        </p:txBody>
       </p:sp>
       <p:sp>
         <p:nvSpPr>
@@ -16428,6 +17100,10 @@
             <a:prstDash val="solid"/>
           </a:ln>
         </p:spPr>
+        <p:txBody>
+          <a:bodyPr/>
+          <a:p/>
+        </p:txBody>
       </p:sp>
       <p:sp>
         <p:nvSpPr>
@@ -16494,6 +17170,10 @@
             <a:prstDash val="solid"/>
           </a:ln>
         </p:spPr>
+        <p:txBody>
+          <a:bodyPr/>
+          <a:p/>
+        </p:txBody>
       </p:sp>
       <p:sp>
         <p:nvSpPr>
@@ -16599,6 +17279,10 @@
             <a:prstDash val="solid"/>
           </a:ln>
         </p:spPr>
+        <p:txBody>
+          <a:bodyPr/>
+          <a:p/>
+        </p:txBody>
       </p:sp>
       <p:sp>
         <p:nvSpPr>
@@ -16704,6 +17388,10 @@
             <a:prstDash val="solid"/>
           </a:ln>
         </p:spPr>
+        <p:txBody>
+          <a:bodyPr/>
+          <a:p/>
+        </p:txBody>
       </p:sp>
       <p:sp>
         <p:nvSpPr>
@@ -16809,6 +17497,10 @@
             <a:prstDash val="solid"/>
           </a:ln>
         </p:spPr>
+        <p:txBody>
+          <a:bodyPr/>
+          <a:p/>
+        </p:txBody>
       </p:sp>
       <p:sp>
         <p:nvSpPr>
@@ -16914,6 +17606,10 @@
             <a:prstDash val="solid"/>
           </a:ln>
         </p:spPr>
+        <p:txBody>
+          <a:bodyPr/>
+          <a:p/>
+        </p:txBody>
       </p:sp>
       <p:sp>
         <p:nvSpPr>
@@ -16980,6 +17676,10 @@
             <a:prstDash val="solid"/>
           </a:ln>
         </p:spPr>
+        <p:txBody>
+          <a:bodyPr/>
+          <a:p/>
+        </p:txBody>
       </p:sp>
       <p:sp>
         <p:nvSpPr>
@@ -17046,6 +17746,10 @@
             <a:prstDash val="solid"/>
           </a:ln>
         </p:spPr>
+        <p:txBody>
+          <a:bodyPr/>
+          <a:p/>
+        </p:txBody>
       </p:sp>
       <p:sp>
         <p:nvSpPr>
@@ -17112,6 +17816,10 @@
             <a:prstDash val="solid"/>
           </a:ln>
         </p:spPr>
+        <p:txBody>
+          <a:bodyPr/>
+          <a:p/>
+        </p:txBody>
       </p:sp>
       <p:sp>
         <p:nvSpPr>
@@ -17178,6 +17886,10 @@
             <a:prstDash val="solid"/>
           </a:ln>
         </p:spPr>
+        <p:txBody>
+          <a:bodyPr/>
+          <a:p/>
+        </p:txBody>
       </p:sp>
       <p:sp>
         <p:nvSpPr>
